--- a/present/ripwire-showcase.pptx
+++ b/present/ripwire-showcase.pptx
@@ -1264,7 +1264,7 @@
 IT SAYS WHAT IT COULD NOT PROVE
 - 89 of 4,322: #173. 'On ripwire's own tree, over every file:name selector whose selection is all declarations, the binary after #173 shrank 89 of 4,322 answers compared with the one before it, and grew none.' The population is the whole selector set, not a sample, which is why the claim can be one-directional.
 - The defect #173 fixed: the widening matched on the name and the enclosing scope, and that scope drops namespaces, so --callers=a/Store.h:putObject counted callB in b/Store.cpp, a caller of a DIFFERENT Store, and a free function matched on its name alone.
-- 9 verbs: #190, #195 — unproven_defs= on --callers, --callees, --impact, --safe-delete, --path, --uses, --mentions, --verify and --affected. 'all but the first two had answered from the declaration alone and printed a clean zero'.
+- nine listing verbs: #190, #195 — unproven_defs= on --callers, --callees, --impact, --safe-delete, --path, --uses, --mentions, --verify and --affected. 'all but the first two had answered from the declaration alone and printed a clean zero'.
 - incompatible="0": #210 — 'on every verb that resolves a focus symbol at all, --edit-check included, where an incompatible="0" beside unproven_defs= is now stated to be an incomplete read rather than a safe edit'.
 EVERY NUMBER CARRIES ITS DEFINITION
 - graph_unindexed=: #169 — shipped in 0.6.0 with no definition on --lego, --verify and --nonlocal-state, and under --legend=compact on every XML verb except --connect.
@@ -5646,7 +5646,7 @@
                 <a:ea typeface="Courier New" pitchFamily="34" charset="-122"/>
                 <a:cs typeface="Courier New" pitchFamily="34" charset="-120"/>
               </a:rPr>
-              <a:t>9 verbs</a:t>
+              <a:t>nine listing verbs</a:t>
             </a:r>
             <a:endParaRPr lang="en-US" sz="1300" dirty="0"/>
           </a:p>

--- a/present/ripwire-showcase.pptx
+++ b/present/ripwire-showcase.pptx
@@ -3285,7 +3285,7 @@
             <a:r>
               <a:rPr lang="en-US" dirty="0"/>
               <a:t>SOURCES (agent wiring)
-- “31 MCP verbs … 16 read verbs … 12 flagship reflexes … 3 span-addressed edit verbs” — README.md on main 40a1895b: “One stdio server, 31 verbs — 16 read, 12 flagship-reflex, 3 span-addressed edit”.
+- “33 MCP verbs … 17 read verbs … 13 flagship reflexes … 3 span-addressed edit verbs” — README.md, lane/t10-mcp-coverage: “One stdio server, 33 verbs — 17 read, 13 flagship-reflex, 3 span-addressed edit” (rank_by and affected joined the MCP surface, matching the CLI --rank-by / --affected twins).
 - “18 agent skills” — README.md: “skills/ ships eighteen task-shaped skills”; skills/ holds 18 directories.
 - “12 orchestrator loops” — README.md: “prompts/ holds twelve self-contained orchestrator prompts”, and prompts/ holds 12 .md files besides its own README.md. This card said 11 until 2026-09-11; test/readmedriftcheck.sh arm (I1) gates the README against the directory, and the deck now states the same number.</a:t>
             </a:r>
@@ -24405,7 +24405,7 @@
                 <a:ea typeface="Arial" pitchFamily="34" charset="-122"/>
                 <a:cs typeface="Arial" pitchFamily="34" charset="-120"/>
               </a:rPr>
-              <a:t>618 gate scripts</a:t>
+              <a:t>647 gate scripts</a:t>
             </a:r>
             <a:endParaRPr lang="en-US" sz="1450" dirty="0"/>
           </a:p>
@@ -25145,7 +25145,7 @@
                 <a:ea typeface="Arial" pitchFamily="34" charset="-122"/>
                 <a:cs typeface="Arial" pitchFamily="34" charset="-120"/>
               </a:rPr>
-              <a:t>618</a:t>
+              <a:t>647</a:t>
             </a:r>
             <a:endParaRPr lang="en-US" sz="4200" dirty="0"/>
           </a:p>
@@ -29353,7 +29353,7 @@
                 <a:ea typeface="Arial" pitchFamily="34" charset="-122"/>
                 <a:cs typeface="Arial" pitchFamily="34" charset="-120"/>
               </a:rPr>
-              <a:t>an MCP server and 180 long flags behind one `--help` that is always the authority</a:t>
+              <a:t>an MCP server and 183 long flags behind one `--help` that is always the authority</a:t>
             </a:r>
             <a:endParaRPr lang="en-US" sz="1200" dirty="0"/>
           </a:p>
@@ -29634,7 +29634,7 @@
                 <a:ea typeface="Courier New" pitchFamily="34" charset="-122"/>
                 <a:cs typeface="Courier New" pitchFamily="34" charset="-120"/>
               </a:rPr>
-              <a:t>31 MCP verbs</a:t>
+              <a:t>33 MCP verbs</a:t>
             </a:r>
             <a:endParaRPr lang="en-US" sz="1400" dirty="0"/>
           </a:p>
@@ -29673,7 +29673,7 @@
                 <a:ea typeface="Arial" pitchFamily="34" charset="-122"/>
                 <a:cs typeface="Arial" pitchFamily="34" charset="-120"/>
               </a:rPr>
-              <a:t>16 read verbs mirroring the CLI, 12 flagship reflexes (impact, uses, edit_check, from_trace, connect …), 3 span-addressed edit verbs with a safety contract</a:t>
+              <a:t>17 read verbs mirroring the CLI, 13 flagship reflexes (impact, uses, affected, edit_check, from_trace, connect …), 3 span-addressed edit verbs with a safety contract</a:t>
             </a:r>
             <a:endParaRPr lang="en-US" sz="1150" dirty="0"/>
           </a:p>
@@ -32555,7 +32555,7 @@
                 <a:ea typeface="Arial" pitchFamily="34" charset="-122"/>
                 <a:cs typeface="Arial" pitchFamily="34" charset="-120"/>
               </a:rPr>
-              <a:t>180 long flags · 34 slides</a:t>
+              <a:t>183 long flags · 34 slides</a:t>
             </a:r>
             <a:endParaRPr lang="en-US" sz="1200" dirty="0"/>
           </a:p>
@@ -32870,7 +32870,7 @@
                 <a:ea typeface="Arial" pitchFamily="34" charset="-122"/>
                 <a:cs typeface="Arial" pitchFamily="34" charset="-120"/>
               </a:rPr>
-              <a:t>618 gate scripts</a:t>
+              <a:t>647 gate scripts</a:t>
             </a:r>
             <a:endParaRPr lang="en-US" sz="1200" dirty="0"/>
           </a:p>
@@ -35055,7 +35055,7 @@
                 <a:ea typeface="Courier New" pitchFamily="34" charset="-122"/>
                 <a:cs typeface="Courier New" pitchFamily="34" charset="-120"/>
               </a:rPr>
-              <a:t>--quality-panel  --quality-delta  --dmm  --readability  --ensemble  --context-ratio  --nonlocal-state  --field-affinity  --hotspots  --lint  --clones</a:t>
+              <a:t>--quality-panel  --quality-delta  --dmm  --biggest-first  --ensemble  --context-ratio  --nonlocal-state  --field-affinity  --hotspots  --lint  --clones</a:t>
             </a:r>
             <a:endParaRPr lang="en-US" sz="900" dirty="0"/>
           </a:p>
@@ -35526,7 +35526,7 @@
                 <a:ea typeface="Courier New" pitchFamily="34" charset="-122"/>
                 <a:cs typeface="Courier New" pitchFamily="34" charset="-120"/>
               </a:rPr>
-              <a:t>--help is generated from the binary's own flag table — 180 long flags; docs/COMMANDS.md carries an entry for every one of them, 161 with a recorded invocation and its output</a:t>
+              <a:t>--help is generated from the binary's own flag table — 183 long flags; docs/COMMANDS.md carries an entry for every one of them, 162 with a recorded invocation and its output</a:t>
             </a:r>
             <a:endParaRPr lang="en-US" sz="1050" dirty="0"/>
           </a:p>

--- a/present/ripwire-showcase.pptx
+++ b/present/ripwire-showcase.pptx
@@ -24405,7 +24405,7 @@
                 <a:ea typeface="Arial" pitchFamily="34" charset="-122"/>
                 <a:cs typeface="Arial" pitchFamily="34" charset="-120"/>
               </a:rPr>
-              <a:t>647 gate scripts</a:t>
+              <a:t>648 gate scripts</a:t>
             </a:r>
             <a:endParaRPr lang="en-US" sz="1450" dirty="0"/>
           </a:p>
@@ -25145,7 +25145,7 @@
                 <a:ea typeface="Arial" pitchFamily="34" charset="-122"/>
                 <a:cs typeface="Arial" pitchFamily="34" charset="-120"/>
               </a:rPr>
-              <a:t>647</a:t>
+              <a:t>648</a:t>
             </a:r>
             <a:endParaRPr lang="en-US" sz="4200" dirty="0"/>
           </a:p>
@@ -32870,7 +32870,7 @@
                 <a:ea typeface="Arial" pitchFamily="34" charset="-122"/>
                 <a:cs typeface="Arial" pitchFamily="34" charset="-120"/>
               </a:rPr>
-              <a:t>647 gate scripts</a:t>
+              <a:t>648 gate scripts</a:t>
             </a:r>
             <a:endParaRPr lang="en-US" sz="1200" dirty="0"/>
           </a:p>

--- a/present/ripwire-showcase.pptx
+++ b/present/ripwire-showcase.pptx
@@ -24405,7 +24405,7 @@
                 <a:ea typeface="Arial" pitchFamily="34" charset="-122"/>
                 <a:cs typeface="Arial" pitchFamily="34" charset="-120"/>
               </a:rPr>
-              <a:t>649 gate scripts</a:t>
+              <a:t>650 gate scripts</a:t>
             </a:r>
             <a:endParaRPr lang="en-US" sz="1450" dirty="0"/>
           </a:p>
@@ -25145,7 +25145,7 @@
                 <a:ea typeface="Arial" pitchFamily="34" charset="-122"/>
                 <a:cs typeface="Arial" pitchFamily="34" charset="-120"/>
               </a:rPr>
-              <a:t>649</a:t>
+              <a:t>650</a:t>
             </a:r>
             <a:endParaRPr lang="en-US" sz="4200" dirty="0"/>
           </a:p>
@@ -32870,7 +32870,7 @@
                 <a:ea typeface="Arial" pitchFamily="34" charset="-122"/>
                 <a:cs typeface="Arial" pitchFamily="34" charset="-120"/>
               </a:rPr>
-              <a:t>649 gate scripts</a:t>
+              <a:t>650 gate scripts</a:t>
             </a:r>
             <a:endParaRPr lang="en-US" sz="1200" dirty="0"/>
           </a:p>

--- a/present/ripwire-showcase.pptx
+++ b/present/ripwire-showcase.pptx
@@ -24405,7 +24405,7 @@
                 <a:ea typeface="Arial" pitchFamily="34" charset="-122"/>
                 <a:cs typeface="Arial" pitchFamily="34" charset="-120"/>
               </a:rPr>
-              <a:t>650 gate scripts</a:t>
+              <a:t>658 gate scripts</a:t>
             </a:r>
             <a:endParaRPr lang="en-US" sz="1450" dirty="0"/>
           </a:p>
@@ -25145,7 +25145,7 @@
                 <a:ea typeface="Arial" pitchFamily="34" charset="-122"/>
                 <a:cs typeface="Arial" pitchFamily="34" charset="-120"/>
               </a:rPr>
-              <a:t>650</a:t>
+              <a:t>658</a:t>
             </a:r>
             <a:endParaRPr lang="en-US" sz="4200" dirty="0"/>
           </a:p>
@@ -29353,7 +29353,7 @@
                 <a:ea typeface="Arial" pitchFamily="34" charset="-122"/>
                 <a:cs typeface="Arial" pitchFamily="34" charset="-120"/>
               </a:rPr>
-              <a:t>an MCP server and 183 long flags behind one `--help` that is always the authority</a:t>
+              <a:t>an MCP server and 185 long flags behind one `--help` that is always the authority</a:t>
             </a:r>
             <a:endParaRPr lang="en-US" sz="1200" dirty="0"/>
           </a:p>
@@ -32555,7 +32555,7 @@
                 <a:ea typeface="Arial" pitchFamily="34" charset="-122"/>
                 <a:cs typeface="Arial" pitchFamily="34" charset="-120"/>
               </a:rPr>
-              <a:t>183 long flags · 34 slides</a:t>
+              <a:t>185 long flags · 34 slides</a:t>
             </a:r>
             <a:endParaRPr lang="en-US" sz="1200" dirty="0"/>
           </a:p>
@@ -32870,7 +32870,7 @@
                 <a:ea typeface="Arial" pitchFamily="34" charset="-122"/>
                 <a:cs typeface="Arial" pitchFamily="34" charset="-120"/>
               </a:rPr>
-              <a:t>650 gate scripts</a:t>
+              <a:t>658 gate scripts</a:t>
             </a:r>
             <a:endParaRPr lang="en-US" sz="1200" dirty="0"/>
           </a:p>
@@ -35526,7 +35526,7 @@
                 <a:ea typeface="Courier New" pitchFamily="34" charset="-122"/>
                 <a:cs typeface="Courier New" pitchFamily="34" charset="-120"/>
               </a:rPr>
-              <a:t>--help is generated from the binary's own flag table — 183 long flags; docs/COMMANDS.md carries an entry for every one of them, 162 with a recorded invocation and its output</a:t>
+              <a:t>--help is generated from the binary's own flag table — 185 long flags; docs/COMMANDS.md carries an entry for every one of them, 162 with a recorded invocation and its output</a:t>
             </a:r>
             <a:endParaRPr lang="en-US" sz="1050" dirty="0"/>
           </a:p>
